--- a/docs/video/WMDG-Video-Folien-Reels-7-Stufen.pptx
+++ b/docs/video/WMDG-Video-Folien-Reels-7-Stufen.pptx
@@ -3285,7 +3285,7 @@
       </p:sp>
       <p:pic>
         <p:nvPicPr>
-          <p:cNvPr id="3" name="Picture 2" descr="brain-freigestellt.png"/>
+          <p:cNvPr id="3" name="Picture 2" descr="logo-brain-gold.png"/>
           <p:cNvPicPr>
             <a:picLocks noChangeAspect="1"/>
           </p:cNvPicPr>
@@ -3300,7 +3300,7 @@
         <p:spPr>
           <a:xfrm>
             <a:off x="2651760" y="2194560"/>
-            <a:ext cx="1554480" cy="1554480"/>
+            <a:ext cx="1554480" cy="1484528"/>
           </a:xfrm>
           <a:prstGeom prst="rect">
             <a:avLst/>
